--- a/curso/pptx/S40.pptx
+++ b/curso/pptx/S40.pptx
@@ -7006,7 +7006,7 @@
                 </a:solidFill>
                 <a:latin typeface="Nunito Sans"/>
               </a:rPr>
-              <a:t>Causa:</a:t>
+              <a:t>因果：</a:t>
             </a:r>
             <a:r>
               <a:rPr sz="2800" b="0">
@@ -7015,7 +7015,7 @@
                 </a:solidFill>
                 <a:latin typeface="Nunito Sans"/>
               </a:rPr>
-              <a:t> una cosa </a:t>
+              <a:t>一件事</a:t>
             </a:r>
             <a:r>
               <a:rPr sz="2800" b="1">
@@ -7024,7 +7024,7 @@
                 </a:solidFill>
                 <a:latin typeface="Nunito Sans"/>
               </a:rPr>
-              <a:t>produce</a:t>
+              <a:t>产生</a:t>
             </a:r>
             <a:r>
               <a:rPr sz="2800" b="0">
@@ -7033,7 +7033,7 @@
                 </a:solidFill>
                 <a:latin typeface="Nunito Sans"/>
               </a:rPr>
-              <a:t> la otra</a:t>
+              <a:t>另一件事</a:t>
             </a:r>
           </a:p>
           <a:p>
@@ -7058,7 +7058,7 @@
                 </a:solidFill>
                 <a:latin typeface="Nunito Sans"/>
               </a:rPr>
-              <a:t>Sola, la correlación es una pista, no una prueba</a:t>
+              <a:t>单独的相关只是一个线索，不是证据</a:t>
             </a:r>
           </a:p>
           <a:p>
@@ -7083,7 +7083,7 @@
                 </a:solidFill>
                 <a:latin typeface="Nunito Sans"/>
               </a:rPr>
-              <a:t>Sesión 22: «después de» no es «por culpa de»</a:t>
+              <a:t>第22课：“在……之后”不等于“因为……”</a:t>
             </a:r>
           </a:p>
         </p:txBody>
@@ -7274,7 +7274,7 @@
                 </a:solidFill>
                 <a:latin typeface="Nunito Sans"/>
               </a:rPr>
-              <a:t>A causa B</a:t>
+              <a:t>A导致B</a:t>
             </a:r>
             <a:r>
               <a:rPr sz="2800" b="0">
@@ -7283,7 +7283,7 @@
                 </a:solidFill>
                 <a:latin typeface="Nunito Sans"/>
               </a:rPr>
-              <a:t> (a veces es verdad)</a:t>
+              <a:t>（有时是真的）</a:t>
             </a:r>
           </a:p>
           <a:p>
@@ -7308,7 +7308,7 @@
                 </a:solidFill>
                 <a:latin typeface="Nunito Sans"/>
               </a:rPr>
-              <a:t>B causa A</a:t>
+              <a:t>B导致A</a:t>
             </a:r>
             <a:r>
               <a:rPr sz="2800" b="0">
@@ -7317,7 +7317,7 @@
                 </a:solidFill>
                 <a:latin typeface="Nunito Sans"/>
               </a:rPr>
-              <a:t> (al revés)</a:t>
+              <a:t>（反过来）</a:t>
             </a:r>
           </a:p>
           <a:p>
@@ -7342,7 +7342,7 @@
                 </a:solidFill>
                 <a:latin typeface="Nunito Sans"/>
               </a:rPr>
-              <a:t>Una tercera causa</a:t>
+              <a:t>第三个原因</a:t>
             </a:r>
             <a:r>
               <a:rPr sz="2800" b="0">
@@ -7351,7 +7351,7 @@
                 </a:solidFill>
                 <a:latin typeface="Nunito Sans"/>
               </a:rPr>
-              <a:t> produce las dos</a:t>
+              <a:t>同时产生了这两者</a:t>
             </a:r>
           </a:p>
           <a:p>
@@ -7376,7 +7376,7 @@
                 </a:solidFill>
                 <a:latin typeface="Nunito Sans"/>
               </a:rPr>
-              <a:t>Casualidad:</a:t>
+              <a:t>巧合：</a:t>
             </a:r>
             <a:r>
               <a:rPr sz="2800" b="0">
@@ -7385,7 +7385,7 @@
                 </a:solidFill>
                 <a:latin typeface="Nunito Sans"/>
               </a:rPr>
-              <a:t> coinciden sin tener nada que ver</a:t>
+              <a:t>碰巧一致，但毫无关系</a:t>
             </a:r>
           </a:p>
         </p:txBody>
